--- a/lectures/week-04-icow/index.pptx
+++ b/lectures/week-04-icow/index.pptx
@@ -5024,7 +5024,7 @@
             <a:br/>
             <a:r>
               <a:rPr/>
-              <a:t>Dr. James Doss-Gollin</a:t>
+              <a:t>James Doss-Gollin</a:t>
             </a:r>
           </a:p>
         </p:txBody>

--- a/lectures/week-04-icow/index.pptx
+++ b/lectures/week-04-icow/index.pptx
@@ -5157,7 +5157,9 @@
         <p:nvSpPr>
           <p:cNvPr id="1" name="TextBox 3"/>
           <p:cNvSpPr txBox="1"/>
-          <p:nvPr/>
+          <p:nvPr>
+            <p:ph idx="1"/>
+          </p:nvPr>
         </p:nvSpPr>
         <p:spPr>
           <a:xfrm>
@@ -5178,7 +5180,7 @@
             </a:pPr>
             <a:r>
               <a:rPr/>
-              <a:t>Source: Ceres, Forest, and Keller (2019)</a:t>
+              <a:t>Source: Ceres et al. (2019)</a:t>
             </a:r>
           </a:p>
         </p:txBody>
@@ -7355,7 +7357,9 @@
         <p:nvSpPr>
           <p:cNvPr id="1" name="TextBox 3"/>
           <p:cNvSpPr txBox="1"/>
-          <p:nvPr/>
+          <p:nvPr>
+            <p:ph idx="1"/>
+          </p:nvPr>
         </p:nvSpPr>
         <p:spPr>
           <a:xfrm>
@@ -7812,7 +7816,7 @@
             </a:r>
             <a:r>
               <a:rPr/>
-              <a:t> = Island City On a Wedge (Ceres, Forest, and Keller 2019)</a:t>
+              <a:t> = Island City On a Wedge (Ceres et al. 2019)</a:t>
             </a:r>
           </a:p>
           <a:p>
@@ -8128,7 +8132,9 @@
         <p:nvSpPr>
           <p:cNvPr id="1" name="TextBox 3"/>
           <p:cNvSpPr txBox="1"/>
-          <p:nvPr/>
+          <p:nvPr>
+            <p:ph idx="1"/>
+          </p:nvPr>
         </p:nvSpPr>
         <p:spPr>
           <a:xfrm>
@@ -8149,7 +8155,7 @@
             </a:pPr>
             <a:r>
               <a:rPr/>
-              <a:t>ICOW takes city geometry + defense choices → computes expected damages. Source: Ceres, Forest, and Keller (2019)</a:t>
+              <a:t>ICOW takes city geometry + defense choices → computes expected damages. Source: Ceres et al. (2019)</a:t>
             </a:r>
           </a:p>
         </p:txBody>
@@ -8309,7 +8315,9 @@
         <p:nvSpPr>
           <p:cNvPr id="1" name="TextBox 3"/>
           <p:cNvSpPr txBox="1"/>
-          <p:nvPr/>
+          <p:nvPr>
+            <p:ph idx="1"/>
+          </p:nvPr>
         </p:nvSpPr>
         <p:spPr>
           <a:xfrm>
@@ -8330,7 +8338,7 @@
             </a:pPr>
             <a:r>
               <a:rPr/>
-              <a:t>The ICOW paper was modeled after Lower Manhattan. Source: Ceres, Forest, and Keller (2019)</a:t>
+              <a:t>The ICOW paper was modeled after Lower Manhattan. Source: Ceres et al. (2019)</a:t>
             </a:r>
           </a:p>
         </p:txBody>
@@ -8462,7 +8470,9 @@
         <p:nvSpPr>
           <p:cNvPr id="1" name="TextBox 3"/>
           <p:cNvSpPr txBox="1"/>
-          <p:nvPr/>
+          <p:nvPr>
+            <p:ph idx="1"/>
+          </p:nvPr>
         </p:nvSpPr>
         <p:spPr>
           <a:xfrm>
@@ -8483,7 +8493,7 @@
             </a:pPr>
             <a:r>
               <a:rPr/>
-              <a:t>The wedge geometry captures essential features. Source: Ceres, Forest, and Keller (2019)</a:t>
+              <a:t>The wedge geometry captures essential features. Source: Ceres et al. (2019)</a:t>
             </a:r>
           </a:p>
         </p:txBody>
